--- a/projects/02-points-by-gamestate/slides.pptx
+++ b/projects/02-points-by-gamestate/slides.pptx
@@ -4438,7 +4438,7 @@
                 </a:solidFill>
                 <a:latin typeface="JetBrains Mono"/>
               </a:rPr>
-              <a:t>A walking late-equaliser: ~30 career goals in scope, almost entirely in score-tied late minutes.</a:t>
+              <a:t>Mostly assist-type credits (SCA1), not goals — landing unusually often late in the game.</a:t>
             </a:r>
           </a:p>
         </p:txBody>
@@ -4935,7 +4935,7 @@
                 </a:solidFill>
                 <a:latin typeface="DM Sans"/>
               </a:rPr>
-              <a:t>Coaching: late-minute defending decisions get a clean valuation — the equaliser you concede in the 88th minute is worth ~1.7× the one in the 18th.</a:t>
+              <a:t>Coaching: late-minute defending decisions get a clean valuation — the equaliser you concede in the 88th minute costs far more than the one in the 18th.</a:t>
             </a:r>
           </a:p>
         </p:txBody>
@@ -5292,7 +5292,7 @@
                 </a:solidFill>
                 <a:latin typeface="DM Sans"/>
               </a:rPr>
-              <a:t>Penalties and own goals are not separated from open play (next iteration).</a:t>
+              <a:t>Penalties are not separated from open play, and own goals are missing from the shot data.</a:t>
             </a:r>
           </a:p>
         </p:txBody>
@@ -6356,7 +6356,7 @@
                 </a:solidFill>
                 <a:latin typeface="DM Sans"/>
               </a:rPr>
-              <a:t>The model's biggest gainer over the time-blind baseline is Mário Rui (+3.43 ΔEP on 28 G+A) — a late-equaliser specialist the scoreboard underrates.</a:t>
+              <a:t>The model's biggest gainer over the time-blind baseline is Mário Rui (+3.43 ΔEP on 28 G+A) — mostly assist-type credits that land in high-value minutes.</a:t>
             </a:r>
           </a:p>
         </p:txBody>
@@ -8094,7 +8094,7 @@
                 </a:solidFill>
                 <a:latin typeface="DM Sans"/>
               </a:rPr>
-              <a:t>A goal's value is the difference between the two states it connects:</a:t>
+              <a:t>A goal's value compares transitions in the same minute bin:</a:t>
             </a:r>
           </a:p>
         </p:txBody>
@@ -8108,7 +8108,7 @@
         <p:spPr>
           <a:xfrm>
             <a:off x="640080" y="3794760"/>
-            <a:ext cx="10972800" cy="914400"/>
+            <a:ext cx="10972800" cy="1143000"/>
           </a:xfrm>
           <a:prstGeom prst="rect">
             <a:avLst/>
@@ -8151,7 +8151,7 @@
         </p:nvSpPr>
         <p:spPr>
           <a:xfrm>
-            <a:off x="914400" y="4005072"/>
+            <a:off x="914400" y="3977639"/>
             <a:ext cx="10424160" cy="502920"/>
           </a:xfrm>
           <a:prstGeom prst="rect">
@@ -8173,7 +8173,7 @@
                 </a:solidFill>
                 <a:latin typeface="JetBrains Mono"/>
               </a:rPr>
-              <a:t>ep_collected  =  EP(gd_after, bin)  −  EP(gd_before, bin)</a:t>
+              <a:t>ep_collected  =  EP_T(g → g+1, bin)  −  EP_T(g−1 → g, bin)</a:t>
             </a:r>
           </a:p>
         </p:txBody>
@@ -8181,6 +8181,41 @@
       <p:sp>
         <p:nvSpPr>
           <p:cNvPr id="13" name="TextBox 12"/>
+          <p:cNvSpPr txBox="1"/>
+          <p:nvPr/>
+        </p:nvSpPr>
+        <p:spPr>
+          <a:xfrm>
+            <a:off x="914400" y="4526280"/>
+            <a:ext cx="10424160" cy="365760"/>
+          </a:xfrm>
+          <a:prstGeom prst="rect">
+            <a:avLst/>
+          </a:prstGeom>
+          <a:noFill/>
+        </p:spPr>
+        <p:txBody>
+          <a:bodyPr wrap="square" lIns="0" rIns="0" tIns="0" bIns="0" anchor="t">
+            <a:spAutoFit/>
+          </a:bodyPr>
+          <a:lstStyle/>
+          <a:p>
+            <a:pPr algn="l"/>
+            <a:r>
+              <a:rPr sz="1100" b="0" i="0">
+                <a:solidFill>
+                  <a:srgbClr val="5A735A"/>
+                </a:solidFill>
+                <a:latin typeface="JetBrains Mono"/>
+              </a:rPr>
+              <a:t>EP_T = mean final points of the teams that made that transition in that bin. The lowest observed transition in each bin is set to 0.</a:t>
+            </a:r>
+          </a:p>
+        </p:txBody>
+      </p:sp>
+      <p:sp>
+        <p:nvSpPr>
+          <p:cNvPr id="14" name="TextBox 13"/>
           <p:cNvSpPr txBox="1"/>
           <p:nvPr/>
         </p:nvSpPr>

--- a/projects/02-points-by-gamestate/slides.pptx
+++ b/projects/02-points-by-gamestate/slides.pptx
@@ -3311,7 +3311,7 @@
                 </a:solidFill>
                 <a:latin typeface="JetBrains Mono"/>
               </a:rPr>
-              <a:t>MAY 2026</a:t>
+              <a:t>OCTOBER 2026</a:t>
             </a:r>
           </a:p>
         </p:txBody>
